--- a/content/lessons/prokaryotic-and-eukaryotic-cells/btec-unit-1-biology-prokaryotic-and-eukaryotic-cells.pptx
+++ b/content/lessons/prokaryotic-and-eukaryotic-cells/btec-unit-1-biology-prokaryotic-and-eukaryotic-cells.pptx
@@ -11223,7 +11223,7 @@
         <p:spPr>
           <a:xfrm>
             <a:off x="658368" y="2011680"/>
-            <a:ext cx="3249168" cy="3383280"/>
+            <a:ext cx="3249168" cy="1417320"/>
           </a:xfrm>
           <a:prstGeom prst="rect">
             <a:avLst/>
@@ -11249,20 +11249,53 @@
       </p:sp>
       <p:sp>
         <p:nvSpPr>
-          <p:cNvPr id="11" name="Rounded Rectangle 10"/>
+          <p:cNvPr id="11" name="TextBox 10"/>
+          <p:cNvSpPr txBox="1"/>
+          <p:nvPr/>
+        </p:nvSpPr>
+        <p:spPr>
+          <a:xfrm>
+            <a:off x="658368" y="3520440"/>
+            <a:ext cx="3249168" cy="256032"/>
+          </a:xfrm>
+          <a:prstGeom prst="rect">
+            <a:avLst/>
+          </a:prstGeom>
+          <a:noFill/>
+        </p:spPr>
+        <p:txBody>
+          <a:bodyPr wrap="square" anchor="t"/>
+          <a:lstStyle/>
+          <a:p>
+            <a:pPr algn="l"/>
+            <a:r>
+              <a:rPr sz="1100" b="1" i="0" a:ea="Calibri">
+                <a:solidFill>
+                  <a:srgbClr val="475569"/>
+                </a:solidFill>
+                <a:latin typeface="Calibri"/>
+              </a:rPr>
+              <a:t>Write a full-sentence answer</a:t>
+            </a:r>
+          </a:p>
+        </p:txBody>
+      </p:sp>
+      <p:sp>
+        <p:nvSpPr>
+          <p:cNvPr id="12" name="Rectangle 11"/>
           <p:cNvSpPr/>
           <p:nvPr/>
         </p:nvSpPr>
         <p:spPr>
           <a:xfrm>
-            <a:off x="4255008" y="1188720"/>
-            <a:ext cx="3651504" cy="4434840"/>
-          </a:xfrm>
-          <a:prstGeom prst="roundRect">
-            <a:avLst/>
-          </a:prstGeom>
-          <a:solidFill>
-            <a:srgbClr val="FFFFFF"/>
+            <a:off x="658368" y="3858768"/>
+            <a:ext cx="3249168" cy="15875"/>
+          </a:xfrm>
+          <a:prstGeom prst="rect">
+            <a:avLst/>
+          </a:prstGeom>
+          <a:solidFill>
+            <a:srgbClr val="E2E8F0"/>
           </a:solidFill>
           <a:ln>
             <a:noFill/>
@@ -11292,20 +11325,20 @@
       </p:sp>
       <p:sp>
         <p:nvSpPr>
-          <p:cNvPr id="12" name="Rounded Rectangle 11"/>
+          <p:cNvPr id="13" name="Rectangle 12"/>
           <p:cNvSpPr/>
           <p:nvPr/>
         </p:nvSpPr>
         <p:spPr>
           <a:xfrm>
-            <a:off x="4437888" y="1371600"/>
-            <a:ext cx="457200" cy="457200"/>
-          </a:xfrm>
-          <a:prstGeom prst="roundRect">
-            <a:avLst/>
-          </a:prstGeom>
-          <a:solidFill>
-            <a:srgbClr val="9F1239"/>
+            <a:off x="658368" y="4151376"/>
+            <a:ext cx="3249168" cy="15875"/>
+          </a:xfrm>
+          <a:prstGeom prst="rect">
+            <a:avLst/>
+          </a:prstGeom>
+          <a:solidFill>
+            <a:srgbClr val="E2E8F0"/>
           </a:solidFill>
           <a:ln>
             <a:noFill/>
@@ -11335,119 +11368,20 @@
       </p:sp>
       <p:sp>
         <p:nvSpPr>
-          <p:cNvPr id="13" name="TextBox 12"/>
-          <p:cNvSpPr txBox="1"/>
-          <p:nvPr/>
-        </p:nvSpPr>
-        <p:spPr>
-          <a:xfrm>
-            <a:off x="4437888" y="1426464"/>
-            <a:ext cx="457200" cy="365760"/>
-          </a:xfrm>
-          <a:prstGeom prst="rect">
-            <a:avLst/>
-          </a:prstGeom>
-          <a:noFill/>
-        </p:spPr>
-        <p:txBody>
-          <a:bodyPr wrap="square" anchor="t"/>
-          <a:lstStyle/>
-          <a:p>
-            <a:pPr algn="ctr"/>
-            <a:r>
-              <a:rPr sz="1600" b="1" i="0" a:ea="Calibri">
-                <a:solidFill>
-                  <a:srgbClr val="FFFFFF"/>
-                </a:solidFill>
-                <a:latin typeface="Calibri"/>
-              </a:rPr>
-              <a:t>2</a:t>
-            </a:r>
-          </a:p>
-        </p:txBody>
-      </p:sp>
-      <p:sp>
-        <p:nvSpPr>
-          <p:cNvPr id="14" name="TextBox 13"/>
-          <p:cNvSpPr txBox="1"/>
-          <p:nvPr/>
-        </p:nvSpPr>
-        <p:spPr>
-          <a:xfrm>
-            <a:off x="4986528" y="1426464"/>
-            <a:ext cx="2645664" cy="365760"/>
-          </a:xfrm>
-          <a:prstGeom prst="rect">
-            <a:avLst/>
-          </a:prstGeom>
-          <a:noFill/>
-        </p:spPr>
-        <p:txBody>
-          <a:bodyPr wrap="square" anchor="t"/>
-          <a:lstStyle/>
-          <a:p>
-            <a:pPr algn="l"/>
-            <a:r>
-              <a:rPr sz="1300" b="1" i="0" a:ea="Calibri">
-                <a:solidFill>
-                  <a:srgbClr val="9F1239"/>
-                </a:solidFill>
-                <a:latin typeface="Calibri"/>
-              </a:rPr>
-              <a:t>3 marks</a:t>
-            </a:r>
-          </a:p>
-        </p:txBody>
-      </p:sp>
-      <p:sp>
-        <p:nvSpPr>
-          <p:cNvPr id="15" name="TextBox 14"/>
-          <p:cNvSpPr txBox="1"/>
-          <p:nvPr/>
-        </p:nvSpPr>
-        <p:spPr>
-          <a:xfrm>
-            <a:off x="4456176" y="2011680"/>
-            <a:ext cx="3249168" cy="3383280"/>
-          </a:xfrm>
-          <a:prstGeom prst="rect">
-            <a:avLst/>
-          </a:prstGeom>
-          <a:noFill/>
-        </p:spPr>
-        <p:txBody>
-          <a:bodyPr wrap="square" anchor="t"/>
-          <a:lstStyle/>
-          <a:p>
-            <a:pPr algn="l"/>
-            <a:r>
-              <a:rPr sz="1600" b="0" i="0" a:ea="Calibri">
-                <a:solidFill>
-                  <a:srgbClr val="0F172A"/>
-                </a:solidFill>
-                <a:latin typeface="Calibri"/>
-              </a:rPr>
-              <a:t>Explain how a plasmid can be medically important.</a:t>
-            </a:r>
-          </a:p>
-        </p:txBody>
-      </p:sp>
-      <p:sp>
-        <p:nvSpPr>
-          <p:cNvPr id="16" name="Rounded Rectangle 15"/>
+          <p:cNvPr id="14" name="Rectangle 13"/>
           <p:cNvSpPr/>
           <p:nvPr/>
         </p:nvSpPr>
         <p:spPr>
           <a:xfrm>
-            <a:off x="8052816" y="1188720"/>
-            <a:ext cx="3651504" cy="4434840"/>
-          </a:xfrm>
-          <a:prstGeom prst="roundRect">
-            <a:avLst/>
-          </a:prstGeom>
-          <a:solidFill>
-            <a:srgbClr val="FFFFFF"/>
+            <a:off x="658368" y="4443984"/>
+            <a:ext cx="3249168" cy="15875"/>
+          </a:xfrm>
+          <a:prstGeom prst="rect">
+            <a:avLst/>
+          </a:prstGeom>
+          <a:solidFill>
+            <a:srgbClr val="E2E8F0"/>
           </a:solidFill>
           <a:ln>
             <a:noFill/>
@@ -11477,20 +11411,20 @@
       </p:sp>
       <p:sp>
         <p:nvSpPr>
-          <p:cNvPr id="17" name="Rounded Rectangle 16"/>
+          <p:cNvPr id="15" name="Rectangle 14"/>
           <p:cNvSpPr/>
           <p:nvPr/>
         </p:nvSpPr>
         <p:spPr>
           <a:xfrm>
-            <a:off x="8235696" y="1371600"/>
-            <a:ext cx="457200" cy="457200"/>
-          </a:xfrm>
-          <a:prstGeom prst="roundRect">
-            <a:avLst/>
-          </a:prstGeom>
-          <a:solidFill>
-            <a:srgbClr val="9F1239"/>
+            <a:off x="658368" y="4736592"/>
+            <a:ext cx="3249168" cy="15875"/>
+          </a:xfrm>
+          <a:prstGeom prst="rect">
+            <a:avLst/>
+          </a:prstGeom>
+          <a:solidFill>
+            <a:srgbClr val="E2E8F0"/>
           </a:solidFill>
           <a:ln>
             <a:noFill/>
@@ -11520,152 +11454,20 @@
       </p:sp>
       <p:sp>
         <p:nvSpPr>
-          <p:cNvPr id="18" name="TextBox 17"/>
-          <p:cNvSpPr txBox="1"/>
-          <p:nvPr/>
-        </p:nvSpPr>
-        <p:spPr>
-          <a:xfrm>
-            <a:off x="8235696" y="1426464"/>
-            <a:ext cx="457200" cy="365760"/>
-          </a:xfrm>
-          <a:prstGeom prst="rect">
-            <a:avLst/>
-          </a:prstGeom>
-          <a:noFill/>
-        </p:spPr>
-        <p:txBody>
-          <a:bodyPr wrap="square" anchor="t"/>
-          <a:lstStyle/>
-          <a:p>
-            <a:pPr algn="ctr"/>
-            <a:r>
-              <a:rPr sz="1600" b="1" i="0" a:ea="Calibri">
-                <a:solidFill>
-                  <a:srgbClr val="FFFFFF"/>
-                </a:solidFill>
-                <a:latin typeface="Calibri"/>
-              </a:rPr>
-              <a:t>3</a:t>
-            </a:r>
-          </a:p>
-        </p:txBody>
-      </p:sp>
-      <p:sp>
-        <p:nvSpPr>
-          <p:cNvPr id="19" name="TextBox 18"/>
-          <p:cNvSpPr txBox="1"/>
-          <p:nvPr/>
-        </p:nvSpPr>
-        <p:spPr>
-          <a:xfrm>
-            <a:off x="8784336" y="1426464"/>
-            <a:ext cx="2645664" cy="365760"/>
-          </a:xfrm>
-          <a:prstGeom prst="rect">
-            <a:avLst/>
-          </a:prstGeom>
-          <a:noFill/>
-        </p:spPr>
-        <p:txBody>
-          <a:bodyPr wrap="square" anchor="t"/>
-          <a:lstStyle/>
-          <a:p>
-            <a:pPr algn="l"/>
-            <a:r>
-              <a:rPr sz="1300" b="1" i="0" a:ea="Calibri">
-                <a:solidFill>
-                  <a:srgbClr val="9F1239"/>
-                </a:solidFill>
-                <a:latin typeface="Calibri"/>
-              </a:rPr>
-              <a:t>2 marks</a:t>
-            </a:r>
-          </a:p>
-        </p:txBody>
-      </p:sp>
-      <p:sp>
-        <p:nvSpPr>
-          <p:cNvPr id="20" name="TextBox 19"/>
-          <p:cNvSpPr txBox="1"/>
-          <p:nvPr/>
-        </p:nvSpPr>
-        <p:spPr>
-          <a:xfrm>
-            <a:off x="8253984" y="2011680"/>
-            <a:ext cx="3249168" cy="3383280"/>
-          </a:xfrm>
-          <a:prstGeom prst="rect">
-            <a:avLst/>
-          </a:prstGeom>
-          <a:noFill/>
-        </p:spPr>
-        <p:txBody>
-          <a:bodyPr wrap="square" anchor="t"/>
-          <a:lstStyle/>
-          <a:p>
-            <a:pPr algn="l"/>
-            <a:r>
-              <a:rPr sz="1600" b="0" i="0" a:ea="Calibri">
-                <a:solidFill>
-                  <a:srgbClr val="0F172A"/>
-                </a:solidFill>
-                <a:latin typeface="Calibri"/>
-              </a:rPr>
-              <a:t>A student writes that mitochondria prove a cell is prokaryotic. Explain the error.</a:t>
-            </a:r>
-          </a:p>
-        </p:txBody>
-      </p:sp>
-      <p:sp>
-        <p:nvSpPr>
-          <p:cNvPr id="21" name="TextBox 20"/>
-          <p:cNvSpPr txBox="1"/>
-          <p:nvPr/>
-        </p:nvSpPr>
-        <p:spPr>
-          <a:xfrm>
-            <a:off x="457200" y="5742432"/>
-            <a:ext cx="11247120" cy="274320"/>
-          </a:xfrm>
-          <a:prstGeom prst="rect">
-            <a:avLst/>
-          </a:prstGeom>
-          <a:noFill/>
-        </p:spPr>
-        <p:txBody>
-          <a:bodyPr wrap="square" anchor="t"/>
-          <a:lstStyle/>
-          <a:p>
-            <a:pPr algn="l"/>
-            <a:r>
-              <a:rPr sz="1300" b="1" i="0" a:ea="Calibri">
-                <a:solidFill>
-                  <a:srgbClr val="9F1239"/>
-                </a:solidFill>
-                <a:latin typeface="Calibri"/>
-              </a:rPr>
-              <a:t>Think first — answers are on the next slide.</a:t>
-            </a:r>
-          </a:p>
-        </p:txBody>
-      </p:sp>
-      <p:sp>
-        <p:nvSpPr>
-          <p:cNvPr id="22" name="Rectangle 21"/>
+          <p:cNvPr id="16" name="Rounded Rectangle 15"/>
           <p:cNvSpPr/>
           <p:nvPr/>
         </p:nvSpPr>
         <p:spPr>
           <a:xfrm>
-            <a:off x="0" y="6437376"/>
-            <a:ext cx="12191695" cy="420624"/>
-          </a:xfrm>
-          <a:prstGeom prst="rect">
-            <a:avLst/>
-          </a:prstGeom>
-          <a:solidFill>
-            <a:srgbClr val="004D40"/>
+            <a:off x="4255008" y="1188720"/>
+            <a:ext cx="3651504" cy="4434840"/>
+          </a:xfrm>
+          <a:prstGeom prst="roundRect">
+            <a:avLst/>
+          </a:prstGeom>
+          <a:solidFill>
+            <a:srgbClr val="FFFFFF"/>
           </a:solidFill>
           <a:ln>
             <a:noFill/>
@@ -11693,9 +11495,822 @@
           </a:p>
         </p:txBody>
       </p:sp>
+      <p:sp>
+        <p:nvSpPr>
+          <p:cNvPr id="17" name="Rounded Rectangle 16"/>
+          <p:cNvSpPr/>
+          <p:nvPr/>
+        </p:nvSpPr>
+        <p:spPr>
+          <a:xfrm>
+            <a:off x="4437888" y="1371600"/>
+            <a:ext cx="457200" cy="457200"/>
+          </a:xfrm>
+          <a:prstGeom prst="roundRect">
+            <a:avLst/>
+          </a:prstGeom>
+          <a:solidFill>
+            <a:srgbClr val="9F1239"/>
+          </a:solidFill>
+          <a:ln>
+            <a:noFill/>
+          </a:ln>
+        </p:spPr>
+        <p:style>
+          <a:lnRef idx="1">
+            <a:schemeClr val="accent1"/>
+          </a:lnRef>
+          <a:fillRef idx="3">
+            <a:schemeClr val="accent1"/>
+          </a:fillRef>
+          <a:effectRef idx="2">
+            <a:schemeClr val="accent1"/>
+          </a:effectRef>
+          <a:fontRef idx="minor">
+            <a:schemeClr val="lt1"/>
+          </a:fontRef>
+        </p:style>
+        <p:txBody>
+          <a:bodyPr rtlCol="0" anchor="ctr"/>
+          <a:lstStyle/>
+          <a:p>
+            <a:pPr algn="ctr"/>
+          </a:p>
+        </p:txBody>
+      </p:sp>
+      <p:sp>
+        <p:nvSpPr>
+          <p:cNvPr id="18" name="TextBox 17"/>
+          <p:cNvSpPr txBox="1"/>
+          <p:nvPr/>
+        </p:nvSpPr>
+        <p:spPr>
+          <a:xfrm>
+            <a:off x="4437888" y="1426464"/>
+            <a:ext cx="457200" cy="365760"/>
+          </a:xfrm>
+          <a:prstGeom prst="rect">
+            <a:avLst/>
+          </a:prstGeom>
+          <a:noFill/>
+        </p:spPr>
+        <p:txBody>
+          <a:bodyPr wrap="square" anchor="t"/>
+          <a:lstStyle/>
+          <a:p>
+            <a:pPr algn="ctr"/>
+            <a:r>
+              <a:rPr sz="1600" b="1" i="0" a:ea="Calibri">
+                <a:solidFill>
+                  <a:srgbClr val="FFFFFF"/>
+                </a:solidFill>
+                <a:latin typeface="Calibri"/>
+              </a:rPr>
+              <a:t>2</a:t>
+            </a:r>
+          </a:p>
+        </p:txBody>
+      </p:sp>
+      <p:sp>
+        <p:nvSpPr>
+          <p:cNvPr id="19" name="TextBox 18"/>
+          <p:cNvSpPr txBox="1"/>
+          <p:nvPr/>
+        </p:nvSpPr>
+        <p:spPr>
+          <a:xfrm>
+            <a:off x="4986528" y="1426464"/>
+            <a:ext cx="2645664" cy="365760"/>
+          </a:xfrm>
+          <a:prstGeom prst="rect">
+            <a:avLst/>
+          </a:prstGeom>
+          <a:noFill/>
+        </p:spPr>
+        <p:txBody>
+          <a:bodyPr wrap="square" anchor="t"/>
+          <a:lstStyle/>
+          <a:p>
+            <a:pPr algn="l"/>
+            <a:r>
+              <a:rPr sz="1300" b="1" i="0" a:ea="Calibri">
+                <a:solidFill>
+                  <a:srgbClr val="9F1239"/>
+                </a:solidFill>
+                <a:latin typeface="Calibri"/>
+              </a:rPr>
+              <a:t>3 marks</a:t>
+            </a:r>
+          </a:p>
+        </p:txBody>
+      </p:sp>
+      <p:sp>
+        <p:nvSpPr>
+          <p:cNvPr id="20" name="TextBox 19"/>
+          <p:cNvSpPr txBox="1"/>
+          <p:nvPr/>
+        </p:nvSpPr>
+        <p:spPr>
+          <a:xfrm>
+            <a:off x="4456176" y="2011680"/>
+            <a:ext cx="3249168" cy="1417320"/>
+          </a:xfrm>
+          <a:prstGeom prst="rect">
+            <a:avLst/>
+          </a:prstGeom>
+          <a:noFill/>
+        </p:spPr>
+        <p:txBody>
+          <a:bodyPr wrap="square" anchor="t"/>
+          <a:lstStyle/>
+          <a:p>
+            <a:pPr algn="l"/>
+            <a:r>
+              <a:rPr sz="1600" b="0" i="0" a:ea="Calibri">
+                <a:solidFill>
+                  <a:srgbClr val="0F172A"/>
+                </a:solidFill>
+                <a:latin typeface="Calibri"/>
+              </a:rPr>
+              <a:t>Explain how a plasmid can be medically important.</a:t>
+            </a:r>
+          </a:p>
+        </p:txBody>
+      </p:sp>
+      <p:sp>
+        <p:nvSpPr>
+          <p:cNvPr id="21" name="TextBox 20"/>
+          <p:cNvSpPr txBox="1"/>
+          <p:nvPr/>
+        </p:nvSpPr>
+        <p:spPr>
+          <a:xfrm>
+            <a:off x="4456176" y="3520440"/>
+            <a:ext cx="3249168" cy="256032"/>
+          </a:xfrm>
+          <a:prstGeom prst="rect">
+            <a:avLst/>
+          </a:prstGeom>
+          <a:noFill/>
+        </p:spPr>
+        <p:txBody>
+          <a:bodyPr wrap="square" anchor="t"/>
+          <a:lstStyle/>
+          <a:p>
+            <a:pPr algn="l"/>
+            <a:r>
+              <a:rPr sz="1100" b="1" i="0" a:ea="Calibri">
+                <a:solidFill>
+                  <a:srgbClr val="475569"/>
+                </a:solidFill>
+                <a:latin typeface="Calibri"/>
+              </a:rPr>
+              <a:t>Write a full-sentence answer</a:t>
+            </a:r>
+          </a:p>
+        </p:txBody>
+      </p:sp>
+      <p:sp>
+        <p:nvSpPr>
+          <p:cNvPr id="22" name="Rectangle 21"/>
+          <p:cNvSpPr/>
+          <p:nvPr/>
+        </p:nvSpPr>
+        <p:spPr>
+          <a:xfrm>
+            <a:off x="4456176" y="3858768"/>
+            <a:ext cx="3249168" cy="15875"/>
+          </a:xfrm>
+          <a:prstGeom prst="rect">
+            <a:avLst/>
+          </a:prstGeom>
+          <a:solidFill>
+            <a:srgbClr val="E2E8F0"/>
+          </a:solidFill>
+          <a:ln>
+            <a:noFill/>
+          </a:ln>
+        </p:spPr>
+        <p:style>
+          <a:lnRef idx="1">
+            <a:schemeClr val="accent1"/>
+          </a:lnRef>
+          <a:fillRef idx="3">
+            <a:schemeClr val="accent1"/>
+          </a:fillRef>
+          <a:effectRef idx="2">
+            <a:schemeClr val="accent1"/>
+          </a:effectRef>
+          <a:fontRef idx="minor">
+            <a:schemeClr val="lt1"/>
+          </a:fontRef>
+        </p:style>
+        <p:txBody>
+          <a:bodyPr rtlCol="0" anchor="ctr"/>
+          <a:lstStyle/>
+          <a:p>
+            <a:pPr algn="ctr"/>
+          </a:p>
+        </p:txBody>
+      </p:sp>
+      <p:sp>
+        <p:nvSpPr>
+          <p:cNvPr id="23" name="Rectangle 22"/>
+          <p:cNvSpPr/>
+          <p:nvPr/>
+        </p:nvSpPr>
+        <p:spPr>
+          <a:xfrm>
+            <a:off x="4456176" y="4151376"/>
+            <a:ext cx="3249168" cy="15875"/>
+          </a:xfrm>
+          <a:prstGeom prst="rect">
+            <a:avLst/>
+          </a:prstGeom>
+          <a:solidFill>
+            <a:srgbClr val="E2E8F0"/>
+          </a:solidFill>
+          <a:ln>
+            <a:noFill/>
+          </a:ln>
+        </p:spPr>
+        <p:style>
+          <a:lnRef idx="1">
+            <a:schemeClr val="accent1"/>
+          </a:lnRef>
+          <a:fillRef idx="3">
+            <a:schemeClr val="accent1"/>
+          </a:fillRef>
+          <a:effectRef idx="2">
+            <a:schemeClr val="accent1"/>
+          </a:effectRef>
+          <a:fontRef idx="minor">
+            <a:schemeClr val="lt1"/>
+          </a:fontRef>
+        </p:style>
+        <p:txBody>
+          <a:bodyPr rtlCol="0" anchor="ctr"/>
+          <a:lstStyle/>
+          <a:p>
+            <a:pPr algn="ctr"/>
+          </a:p>
+        </p:txBody>
+      </p:sp>
+      <p:sp>
+        <p:nvSpPr>
+          <p:cNvPr id="24" name="Rectangle 23"/>
+          <p:cNvSpPr/>
+          <p:nvPr/>
+        </p:nvSpPr>
+        <p:spPr>
+          <a:xfrm>
+            <a:off x="4456176" y="4443984"/>
+            <a:ext cx="3249168" cy="15875"/>
+          </a:xfrm>
+          <a:prstGeom prst="rect">
+            <a:avLst/>
+          </a:prstGeom>
+          <a:solidFill>
+            <a:srgbClr val="E2E8F0"/>
+          </a:solidFill>
+          <a:ln>
+            <a:noFill/>
+          </a:ln>
+        </p:spPr>
+        <p:style>
+          <a:lnRef idx="1">
+            <a:schemeClr val="accent1"/>
+          </a:lnRef>
+          <a:fillRef idx="3">
+            <a:schemeClr val="accent1"/>
+          </a:fillRef>
+          <a:effectRef idx="2">
+            <a:schemeClr val="accent1"/>
+          </a:effectRef>
+          <a:fontRef idx="minor">
+            <a:schemeClr val="lt1"/>
+          </a:fontRef>
+        </p:style>
+        <p:txBody>
+          <a:bodyPr rtlCol="0" anchor="ctr"/>
+          <a:lstStyle/>
+          <a:p>
+            <a:pPr algn="ctr"/>
+          </a:p>
+        </p:txBody>
+      </p:sp>
+      <p:sp>
+        <p:nvSpPr>
+          <p:cNvPr id="25" name="Rectangle 24"/>
+          <p:cNvSpPr/>
+          <p:nvPr/>
+        </p:nvSpPr>
+        <p:spPr>
+          <a:xfrm>
+            <a:off x="4456176" y="4736592"/>
+            <a:ext cx="3249168" cy="15875"/>
+          </a:xfrm>
+          <a:prstGeom prst="rect">
+            <a:avLst/>
+          </a:prstGeom>
+          <a:solidFill>
+            <a:srgbClr val="E2E8F0"/>
+          </a:solidFill>
+          <a:ln>
+            <a:noFill/>
+          </a:ln>
+        </p:spPr>
+        <p:style>
+          <a:lnRef idx="1">
+            <a:schemeClr val="accent1"/>
+          </a:lnRef>
+          <a:fillRef idx="3">
+            <a:schemeClr val="accent1"/>
+          </a:fillRef>
+          <a:effectRef idx="2">
+            <a:schemeClr val="accent1"/>
+          </a:effectRef>
+          <a:fontRef idx="minor">
+            <a:schemeClr val="lt1"/>
+          </a:fontRef>
+        </p:style>
+        <p:txBody>
+          <a:bodyPr rtlCol="0" anchor="ctr"/>
+          <a:lstStyle/>
+          <a:p>
+            <a:pPr algn="ctr"/>
+          </a:p>
+        </p:txBody>
+      </p:sp>
+      <p:sp>
+        <p:nvSpPr>
+          <p:cNvPr id="26" name="Rounded Rectangle 25"/>
+          <p:cNvSpPr/>
+          <p:nvPr/>
+        </p:nvSpPr>
+        <p:spPr>
+          <a:xfrm>
+            <a:off x="8052816" y="1188720"/>
+            <a:ext cx="3651504" cy="4434840"/>
+          </a:xfrm>
+          <a:prstGeom prst="roundRect">
+            <a:avLst/>
+          </a:prstGeom>
+          <a:solidFill>
+            <a:srgbClr val="FFFFFF"/>
+          </a:solidFill>
+          <a:ln>
+            <a:noFill/>
+          </a:ln>
+        </p:spPr>
+        <p:style>
+          <a:lnRef idx="1">
+            <a:schemeClr val="accent1"/>
+          </a:lnRef>
+          <a:fillRef idx="3">
+            <a:schemeClr val="accent1"/>
+          </a:fillRef>
+          <a:effectRef idx="2">
+            <a:schemeClr val="accent1"/>
+          </a:effectRef>
+          <a:fontRef idx="minor">
+            <a:schemeClr val="lt1"/>
+          </a:fontRef>
+        </p:style>
+        <p:txBody>
+          <a:bodyPr rtlCol="0" anchor="ctr"/>
+          <a:lstStyle/>
+          <a:p>
+            <a:pPr algn="ctr"/>
+          </a:p>
+        </p:txBody>
+      </p:sp>
+      <p:sp>
+        <p:nvSpPr>
+          <p:cNvPr id="27" name="Rounded Rectangle 26"/>
+          <p:cNvSpPr/>
+          <p:nvPr/>
+        </p:nvSpPr>
+        <p:spPr>
+          <a:xfrm>
+            <a:off x="8235696" y="1371600"/>
+            <a:ext cx="457200" cy="457200"/>
+          </a:xfrm>
+          <a:prstGeom prst="roundRect">
+            <a:avLst/>
+          </a:prstGeom>
+          <a:solidFill>
+            <a:srgbClr val="9F1239"/>
+          </a:solidFill>
+          <a:ln>
+            <a:noFill/>
+          </a:ln>
+        </p:spPr>
+        <p:style>
+          <a:lnRef idx="1">
+            <a:schemeClr val="accent1"/>
+          </a:lnRef>
+          <a:fillRef idx="3">
+            <a:schemeClr val="accent1"/>
+          </a:fillRef>
+          <a:effectRef idx="2">
+            <a:schemeClr val="accent1"/>
+          </a:effectRef>
+          <a:fontRef idx="minor">
+            <a:schemeClr val="lt1"/>
+          </a:fontRef>
+        </p:style>
+        <p:txBody>
+          <a:bodyPr rtlCol="0" anchor="ctr"/>
+          <a:lstStyle/>
+          <a:p>
+            <a:pPr algn="ctr"/>
+          </a:p>
+        </p:txBody>
+      </p:sp>
+      <p:sp>
+        <p:nvSpPr>
+          <p:cNvPr id="28" name="TextBox 27"/>
+          <p:cNvSpPr txBox="1"/>
+          <p:nvPr/>
+        </p:nvSpPr>
+        <p:spPr>
+          <a:xfrm>
+            <a:off x="8235696" y="1426464"/>
+            <a:ext cx="457200" cy="365760"/>
+          </a:xfrm>
+          <a:prstGeom prst="rect">
+            <a:avLst/>
+          </a:prstGeom>
+          <a:noFill/>
+        </p:spPr>
+        <p:txBody>
+          <a:bodyPr wrap="square" anchor="t"/>
+          <a:lstStyle/>
+          <a:p>
+            <a:pPr algn="ctr"/>
+            <a:r>
+              <a:rPr sz="1600" b="1" i="0" a:ea="Calibri">
+                <a:solidFill>
+                  <a:srgbClr val="FFFFFF"/>
+                </a:solidFill>
+                <a:latin typeface="Calibri"/>
+              </a:rPr>
+              <a:t>3</a:t>
+            </a:r>
+          </a:p>
+        </p:txBody>
+      </p:sp>
+      <p:sp>
+        <p:nvSpPr>
+          <p:cNvPr id="29" name="TextBox 28"/>
+          <p:cNvSpPr txBox="1"/>
+          <p:nvPr/>
+        </p:nvSpPr>
+        <p:spPr>
+          <a:xfrm>
+            <a:off x="8784336" y="1426464"/>
+            <a:ext cx="2645664" cy="365760"/>
+          </a:xfrm>
+          <a:prstGeom prst="rect">
+            <a:avLst/>
+          </a:prstGeom>
+          <a:noFill/>
+        </p:spPr>
+        <p:txBody>
+          <a:bodyPr wrap="square" anchor="t"/>
+          <a:lstStyle/>
+          <a:p>
+            <a:pPr algn="l"/>
+            <a:r>
+              <a:rPr sz="1300" b="1" i="0" a:ea="Calibri">
+                <a:solidFill>
+                  <a:srgbClr val="9F1239"/>
+                </a:solidFill>
+                <a:latin typeface="Calibri"/>
+              </a:rPr>
+              <a:t>2 marks</a:t>
+            </a:r>
+          </a:p>
+        </p:txBody>
+      </p:sp>
+      <p:sp>
+        <p:nvSpPr>
+          <p:cNvPr id="30" name="TextBox 29"/>
+          <p:cNvSpPr txBox="1"/>
+          <p:nvPr/>
+        </p:nvSpPr>
+        <p:spPr>
+          <a:xfrm>
+            <a:off x="8253984" y="2011680"/>
+            <a:ext cx="3249168" cy="1417320"/>
+          </a:xfrm>
+          <a:prstGeom prst="rect">
+            <a:avLst/>
+          </a:prstGeom>
+          <a:noFill/>
+        </p:spPr>
+        <p:txBody>
+          <a:bodyPr wrap="square" anchor="t"/>
+          <a:lstStyle/>
+          <a:p>
+            <a:pPr algn="l"/>
+            <a:r>
+              <a:rPr sz="1600" b="0" i="0" a:ea="Calibri">
+                <a:solidFill>
+                  <a:srgbClr val="0F172A"/>
+                </a:solidFill>
+                <a:latin typeface="Calibri"/>
+              </a:rPr>
+              <a:t>A student writes that mitochondria prove a cell is prokaryotic. Explain the error.</a:t>
+            </a:r>
+          </a:p>
+        </p:txBody>
+      </p:sp>
+      <p:sp>
+        <p:nvSpPr>
+          <p:cNvPr id="31" name="TextBox 30"/>
+          <p:cNvSpPr txBox="1"/>
+          <p:nvPr/>
+        </p:nvSpPr>
+        <p:spPr>
+          <a:xfrm>
+            <a:off x="8253984" y="3520440"/>
+            <a:ext cx="3249168" cy="256032"/>
+          </a:xfrm>
+          <a:prstGeom prst="rect">
+            <a:avLst/>
+          </a:prstGeom>
+          <a:noFill/>
+        </p:spPr>
+        <p:txBody>
+          <a:bodyPr wrap="square" anchor="t"/>
+          <a:lstStyle/>
+          <a:p>
+            <a:pPr algn="l"/>
+            <a:r>
+              <a:rPr sz="1100" b="1" i="0" a:ea="Calibri">
+                <a:solidFill>
+                  <a:srgbClr val="475569"/>
+                </a:solidFill>
+                <a:latin typeface="Calibri"/>
+              </a:rPr>
+              <a:t>Write a full-sentence answer</a:t>
+            </a:r>
+          </a:p>
+        </p:txBody>
+      </p:sp>
+      <p:sp>
+        <p:nvSpPr>
+          <p:cNvPr id="32" name="Rectangle 31"/>
+          <p:cNvSpPr/>
+          <p:nvPr/>
+        </p:nvSpPr>
+        <p:spPr>
+          <a:xfrm>
+            <a:off x="8253984" y="3858768"/>
+            <a:ext cx="3249168" cy="15875"/>
+          </a:xfrm>
+          <a:prstGeom prst="rect">
+            <a:avLst/>
+          </a:prstGeom>
+          <a:solidFill>
+            <a:srgbClr val="E2E8F0"/>
+          </a:solidFill>
+          <a:ln>
+            <a:noFill/>
+          </a:ln>
+        </p:spPr>
+        <p:style>
+          <a:lnRef idx="1">
+            <a:schemeClr val="accent1"/>
+          </a:lnRef>
+          <a:fillRef idx="3">
+            <a:schemeClr val="accent1"/>
+          </a:fillRef>
+          <a:effectRef idx="2">
+            <a:schemeClr val="accent1"/>
+          </a:effectRef>
+          <a:fontRef idx="minor">
+            <a:schemeClr val="lt1"/>
+          </a:fontRef>
+        </p:style>
+        <p:txBody>
+          <a:bodyPr rtlCol="0" anchor="ctr"/>
+          <a:lstStyle/>
+          <a:p>
+            <a:pPr algn="ctr"/>
+          </a:p>
+        </p:txBody>
+      </p:sp>
+      <p:sp>
+        <p:nvSpPr>
+          <p:cNvPr id="33" name="Rectangle 32"/>
+          <p:cNvSpPr/>
+          <p:nvPr/>
+        </p:nvSpPr>
+        <p:spPr>
+          <a:xfrm>
+            <a:off x="8253984" y="4151376"/>
+            <a:ext cx="3249168" cy="15875"/>
+          </a:xfrm>
+          <a:prstGeom prst="rect">
+            <a:avLst/>
+          </a:prstGeom>
+          <a:solidFill>
+            <a:srgbClr val="E2E8F0"/>
+          </a:solidFill>
+          <a:ln>
+            <a:noFill/>
+          </a:ln>
+        </p:spPr>
+        <p:style>
+          <a:lnRef idx="1">
+            <a:schemeClr val="accent1"/>
+          </a:lnRef>
+          <a:fillRef idx="3">
+            <a:schemeClr val="accent1"/>
+          </a:fillRef>
+          <a:effectRef idx="2">
+            <a:schemeClr val="accent1"/>
+          </a:effectRef>
+          <a:fontRef idx="minor">
+            <a:schemeClr val="lt1"/>
+          </a:fontRef>
+        </p:style>
+        <p:txBody>
+          <a:bodyPr rtlCol="0" anchor="ctr"/>
+          <a:lstStyle/>
+          <a:p>
+            <a:pPr algn="ctr"/>
+          </a:p>
+        </p:txBody>
+      </p:sp>
+      <p:sp>
+        <p:nvSpPr>
+          <p:cNvPr id="34" name="Rectangle 33"/>
+          <p:cNvSpPr/>
+          <p:nvPr/>
+        </p:nvSpPr>
+        <p:spPr>
+          <a:xfrm>
+            <a:off x="8253984" y="4443984"/>
+            <a:ext cx="3249168" cy="15875"/>
+          </a:xfrm>
+          <a:prstGeom prst="rect">
+            <a:avLst/>
+          </a:prstGeom>
+          <a:solidFill>
+            <a:srgbClr val="E2E8F0"/>
+          </a:solidFill>
+          <a:ln>
+            <a:noFill/>
+          </a:ln>
+        </p:spPr>
+        <p:style>
+          <a:lnRef idx="1">
+            <a:schemeClr val="accent1"/>
+          </a:lnRef>
+          <a:fillRef idx="3">
+            <a:schemeClr val="accent1"/>
+          </a:fillRef>
+          <a:effectRef idx="2">
+            <a:schemeClr val="accent1"/>
+          </a:effectRef>
+          <a:fontRef idx="minor">
+            <a:schemeClr val="lt1"/>
+          </a:fontRef>
+        </p:style>
+        <p:txBody>
+          <a:bodyPr rtlCol="0" anchor="ctr"/>
+          <a:lstStyle/>
+          <a:p>
+            <a:pPr algn="ctr"/>
+          </a:p>
+        </p:txBody>
+      </p:sp>
+      <p:sp>
+        <p:nvSpPr>
+          <p:cNvPr id="35" name="Rectangle 34"/>
+          <p:cNvSpPr/>
+          <p:nvPr/>
+        </p:nvSpPr>
+        <p:spPr>
+          <a:xfrm>
+            <a:off x="8253984" y="4736592"/>
+            <a:ext cx="3249168" cy="15875"/>
+          </a:xfrm>
+          <a:prstGeom prst="rect">
+            <a:avLst/>
+          </a:prstGeom>
+          <a:solidFill>
+            <a:srgbClr val="E2E8F0"/>
+          </a:solidFill>
+          <a:ln>
+            <a:noFill/>
+          </a:ln>
+        </p:spPr>
+        <p:style>
+          <a:lnRef idx="1">
+            <a:schemeClr val="accent1"/>
+          </a:lnRef>
+          <a:fillRef idx="3">
+            <a:schemeClr val="accent1"/>
+          </a:fillRef>
+          <a:effectRef idx="2">
+            <a:schemeClr val="accent1"/>
+          </a:effectRef>
+          <a:fontRef idx="minor">
+            <a:schemeClr val="lt1"/>
+          </a:fontRef>
+        </p:style>
+        <p:txBody>
+          <a:bodyPr rtlCol="0" anchor="ctr"/>
+          <a:lstStyle/>
+          <a:p>
+            <a:pPr algn="ctr"/>
+          </a:p>
+        </p:txBody>
+      </p:sp>
+      <p:sp>
+        <p:nvSpPr>
+          <p:cNvPr id="36" name="TextBox 35"/>
+          <p:cNvSpPr txBox="1"/>
+          <p:nvPr/>
+        </p:nvSpPr>
+        <p:spPr>
+          <a:xfrm>
+            <a:off x="457200" y="5742432"/>
+            <a:ext cx="11247120" cy="274320"/>
+          </a:xfrm>
+          <a:prstGeom prst="rect">
+            <a:avLst/>
+          </a:prstGeom>
+          <a:noFill/>
+        </p:spPr>
+        <p:txBody>
+          <a:bodyPr wrap="square" anchor="t"/>
+          <a:lstStyle/>
+          <a:p>
+            <a:pPr algn="l"/>
+            <a:r>
+              <a:rPr sz="1300" b="1" i="0" a:ea="Calibri">
+                <a:solidFill>
+                  <a:srgbClr val="9F1239"/>
+                </a:solidFill>
+                <a:latin typeface="Calibri"/>
+              </a:rPr>
+              <a:t>Think first — answers are on the next slide.</a:t>
+            </a:r>
+          </a:p>
+        </p:txBody>
+      </p:sp>
+      <p:sp>
+        <p:nvSpPr>
+          <p:cNvPr id="37" name="Rectangle 36"/>
+          <p:cNvSpPr/>
+          <p:nvPr/>
+        </p:nvSpPr>
+        <p:spPr>
+          <a:xfrm>
+            <a:off x="0" y="6437376"/>
+            <a:ext cx="12191695" cy="420624"/>
+          </a:xfrm>
+          <a:prstGeom prst="rect">
+            <a:avLst/>
+          </a:prstGeom>
+          <a:solidFill>
+            <a:srgbClr val="004D40"/>
+          </a:solidFill>
+          <a:ln>
+            <a:noFill/>
+          </a:ln>
+        </p:spPr>
+        <p:style>
+          <a:lnRef idx="1">
+            <a:schemeClr val="accent1"/>
+          </a:lnRef>
+          <a:fillRef idx="3">
+            <a:schemeClr val="accent1"/>
+          </a:fillRef>
+          <a:effectRef idx="2">
+            <a:schemeClr val="accent1"/>
+          </a:effectRef>
+          <a:fontRef idx="minor">
+            <a:schemeClr val="lt1"/>
+          </a:fontRef>
+        </p:style>
+        <p:txBody>
+          <a:bodyPr rtlCol="0" anchor="ctr"/>
+          <a:lstStyle/>
+          <a:p>
+            <a:pPr algn="ctr"/>
+          </a:p>
+        </p:txBody>
+      </p:sp>
       <p:pic>
         <p:nvPicPr>
-          <p:cNvPr id="23" name="Picture 22" descr="jdscience-footer-logo.png"/>
+          <p:cNvPr id="38" name="Picture 37" descr="jdscience-footer-logo.png"/>
           <p:cNvPicPr>
             <a:picLocks noChangeAspect="1"/>
           </p:cNvPicPr>
@@ -11719,7 +12334,7 @@
       </p:pic>
       <p:sp>
         <p:nvSpPr>
-          <p:cNvPr id="24" name="TextBox 23"/>
+          <p:cNvPr id="39" name="TextBox 38"/>
           <p:cNvSpPr txBox="1"/>
           <p:nvPr/>
         </p:nvSpPr>
@@ -11752,7 +12367,7 @@
       </p:sp>
       <p:sp>
         <p:nvSpPr>
-          <p:cNvPr id="25" name="TextBox 24"/>
+          <p:cNvPr id="40" name="TextBox 39"/>
           <p:cNvSpPr txBox="1"/>
           <p:nvPr/>
         </p:nvSpPr>
@@ -11785,7 +12400,7 @@
       </p:sp>
       <p:sp>
         <p:nvSpPr>
-          <p:cNvPr id="26" name="TextBox 25"/>
+          <p:cNvPr id="41" name="TextBox 40"/>
           <p:cNvSpPr txBox="1"/>
           <p:nvPr/>
         </p:nvSpPr>
@@ -17858,8 +18473,8 @@
         </p:nvSpPr>
         <p:spPr>
           <a:xfrm>
-            <a:off x="0" y="2880360"/>
-            <a:ext cx="12191695" cy="73152"/>
+            <a:off x="0" y="0"/>
+            <a:ext cx="146304" cy="6858000"/>
           </a:xfrm>
           <a:prstGeom prst="rect">
             <a:avLst/>
@@ -17901,80 +18516,80 @@
         </p:nvSpPr>
         <p:spPr>
           <a:xfrm>
+            <a:off x="640080" y="384048"/>
+            <a:ext cx="10972800" cy="868680"/>
+          </a:xfrm>
+          <a:prstGeom prst="rect">
+            <a:avLst/>
+          </a:prstGeom>
+          <a:noFill/>
+        </p:spPr>
+        <p:txBody>
+          <a:bodyPr wrap="square" anchor="t"/>
+          <a:lstStyle/>
+          <a:p>
+            <a:pPr algn="l"/>
+            <a:r>
+              <a:rPr sz="3000" b="1" i="0" a:ea="Calibri">
+                <a:solidFill>
+                  <a:srgbClr val="FFFFFF"/>
+                </a:solidFill>
+                <a:latin typeface="Calibri"/>
+              </a:rPr>
+              <a:t>Two fundamental cell types</a:t>
+            </a:r>
+          </a:p>
+        </p:txBody>
+      </p:sp>
+      <p:sp>
+        <p:nvSpPr>
+          <p:cNvPr id="5" name="TextBox 4"/>
+          <p:cNvSpPr txBox="1"/>
+          <p:nvPr/>
+        </p:nvSpPr>
+        <p:spPr>
+          <a:xfrm>
+            <a:off x="640080" y="1261872"/>
+            <a:ext cx="10972800" cy="502920"/>
+          </a:xfrm>
+          <a:prstGeom prst="rect">
+            <a:avLst/>
+          </a:prstGeom>
+          <a:noFill/>
+        </p:spPr>
+        <p:txBody>
+          <a:bodyPr wrap="square" anchor="t"/>
+          <a:lstStyle/>
+          <a:p>
+            <a:pPr algn="l"/>
+            <a:r>
+              <a:rPr sz="1700" b="0" i="0" a:ea="Calibri">
+                <a:solidFill>
+                  <a:srgbClr val="CCFBF1"/>
+                </a:solidFill>
+                <a:latin typeface="Calibri"/>
+              </a:rPr>
+              <a:t>The nucleus is the key divide</a:t>
+            </a:r>
+          </a:p>
+        </p:txBody>
+      </p:sp>
+      <p:sp>
+        <p:nvSpPr>
+          <p:cNvPr id="6" name="Rounded Rectangle 5"/>
+          <p:cNvSpPr/>
+          <p:nvPr/>
+        </p:nvSpPr>
+        <p:spPr>
+          <a:xfrm>
             <a:off x="640080" y="1965960"/>
-            <a:ext cx="10881360" cy="914400"/>
-          </a:xfrm>
-          <a:prstGeom prst="rect">
-            <a:avLst/>
-          </a:prstGeom>
-          <a:noFill/>
-        </p:spPr>
-        <p:txBody>
-          <a:bodyPr wrap="square" anchor="t"/>
-          <a:lstStyle/>
-          <a:p>
-            <a:pPr algn="l"/>
-            <a:r>
-              <a:rPr sz="3400" b="1" i="0" a:ea="Calibri">
-                <a:solidFill>
-                  <a:srgbClr val="FFFFFF"/>
-                </a:solidFill>
-                <a:latin typeface="Calibri"/>
-              </a:rPr>
-              <a:t>Two fundamental cell types</a:t>
-            </a:r>
-          </a:p>
-        </p:txBody>
-      </p:sp>
-      <p:sp>
-        <p:nvSpPr>
-          <p:cNvPr id="5" name="TextBox 4"/>
-          <p:cNvSpPr txBox="1"/>
-          <p:nvPr/>
-        </p:nvSpPr>
-        <p:spPr>
-          <a:xfrm>
-            <a:off x="640080" y="3154680"/>
-            <a:ext cx="10881360" cy="822960"/>
-          </a:xfrm>
-          <a:prstGeom prst="rect">
-            <a:avLst/>
-          </a:prstGeom>
-          <a:noFill/>
-        </p:spPr>
-        <p:txBody>
-          <a:bodyPr wrap="square" anchor="t"/>
-          <a:lstStyle/>
-          <a:p>
-            <a:pPr algn="l"/>
-            <a:r>
-              <a:rPr sz="1800" b="0" i="0" a:ea="Calibri">
-                <a:solidFill>
-                  <a:srgbClr val="CCFBF1"/>
-                </a:solidFill>
-                <a:latin typeface="Calibri"/>
-              </a:rPr>
-              <a:t>The nucleus is the key divide</a:t>
-            </a:r>
-          </a:p>
-        </p:txBody>
-      </p:sp>
-      <p:sp>
-        <p:nvSpPr>
-          <p:cNvPr id="6" name="Rectangle 5"/>
-          <p:cNvSpPr/>
-          <p:nvPr/>
-        </p:nvSpPr>
-        <p:spPr>
-          <a:xfrm>
-            <a:off x="0" y="6437376"/>
-            <a:ext cx="12191695" cy="420624"/>
-          </a:xfrm>
-          <a:prstGeom prst="rect">
-            <a:avLst/>
-          </a:prstGeom>
-          <a:solidFill>
-            <a:srgbClr val="004D40"/>
+            <a:ext cx="3520440" cy="3977639"/>
+          </a:xfrm>
+          <a:prstGeom prst="roundRect">
+            <a:avLst/>
+          </a:prstGeom>
+          <a:solidFill>
+            <a:srgbClr val="003D33"/>
           </a:solidFill>
           <a:ln>
             <a:noFill/>
@@ -18002,9 +18617,465 @@
           </a:p>
         </p:txBody>
       </p:sp>
+      <p:sp>
+        <p:nvSpPr>
+          <p:cNvPr id="7" name="Rectangle 6"/>
+          <p:cNvSpPr/>
+          <p:nvPr/>
+        </p:nvSpPr>
+        <p:spPr>
+          <a:xfrm>
+            <a:off x="640080" y="1965960"/>
+            <a:ext cx="3520440" cy="109728"/>
+          </a:xfrm>
+          <a:prstGeom prst="rect">
+            <a:avLst/>
+          </a:prstGeom>
+          <a:solidFill>
+            <a:srgbClr val="009688"/>
+          </a:solidFill>
+          <a:ln>
+            <a:noFill/>
+          </a:ln>
+        </p:spPr>
+        <p:style>
+          <a:lnRef idx="1">
+            <a:schemeClr val="accent1"/>
+          </a:lnRef>
+          <a:fillRef idx="3">
+            <a:schemeClr val="accent1"/>
+          </a:fillRef>
+          <a:effectRef idx="2">
+            <a:schemeClr val="accent1"/>
+          </a:effectRef>
+          <a:fontRef idx="minor">
+            <a:schemeClr val="lt1"/>
+          </a:fontRef>
+        </p:style>
+        <p:txBody>
+          <a:bodyPr rtlCol="0" anchor="ctr"/>
+          <a:lstStyle/>
+          <a:p>
+            <a:pPr algn="ctr"/>
+          </a:p>
+        </p:txBody>
+      </p:sp>
+      <p:sp>
+        <p:nvSpPr>
+          <p:cNvPr id="8" name="TextBox 7"/>
+          <p:cNvSpPr txBox="1"/>
+          <p:nvPr/>
+        </p:nvSpPr>
+        <p:spPr>
+          <a:xfrm>
+            <a:off x="841248" y="2212848"/>
+            <a:ext cx="3108960" cy="457200"/>
+          </a:xfrm>
+          <a:prstGeom prst="rect">
+            <a:avLst/>
+          </a:prstGeom>
+          <a:noFill/>
+        </p:spPr>
+        <p:txBody>
+          <a:bodyPr wrap="square" anchor="t"/>
+          <a:lstStyle/>
+          <a:p>
+            <a:pPr algn="l"/>
+            <a:r>
+              <a:rPr sz="1600" b="1" i="0" a:ea="Calibri">
+                <a:solidFill>
+                  <a:srgbClr val="CCFBF1"/>
+                </a:solidFill>
+                <a:latin typeface="Calibri"/>
+              </a:rPr>
+              <a:t>1   Look for</a:t>
+            </a:r>
+          </a:p>
+        </p:txBody>
+      </p:sp>
+      <p:sp>
+        <p:nvSpPr>
+          <p:cNvPr id="9" name="TextBox 8"/>
+          <p:cNvSpPr txBox="1"/>
+          <p:nvPr/>
+        </p:nvSpPr>
+        <p:spPr>
+          <a:xfrm>
+            <a:off x="841248" y="2788920"/>
+            <a:ext cx="3108960" cy="2880360"/>
+          </a:xfrm>
+          <a:prstGeom prst="rect">
+            <a:avLst/>
+          </a:prstGeom>
+          <a:noFill/>
+        </p:spPr>
+        <p:txBody>
+          <a:bodyPr wrap="square" anchor="t"/>
+          <a:lstStyle/>
+          <a:p>
+            <a:pPr algn="l"/>
+            <a:r>
+              <a:rPr sz="1600" b="0" i="0" a:ea="Calibri">
+                <a:solidFill>
+                  <a:srgbClr val="FFFFFF"/>
+                </a:solidFill>
+                <a:latin typeface="Calibri"/>
+              </a:rPr>
+              <a:t>A nucleus with an envelope versus a DNA loop in the cytoplasm.</a:t>
+            </a:r>
+          </a:p>
+        </p:txBody>
+      </p:sp>
+      <p:sp>
+        <p:nvSpPr>
+          <p:cNvPr id="10" name="Rounded Rectangle 9"/>
+          <p:cNvSpPr/>
+          <p:nvPr/>
+        </p:nvSpPr>
+        <p:spPr>
+          <a:xfrm>
+            <a:off x="4343400" y="1965960"/>
+            <a:ext cx="3520440" cy="3977639"/>
+          </a:xfrm>
+          <a:prstGeom prst="roundRect">
+            <a:avLst/>
+          </a:prstGeom>
+          <a:solidFill>
+            <a:srgbClr val="003D33"/>
+          </a:solidFill>
+          <a:ln>
+            <a:noFill/>
+          </a:ln>
+        </p:spPr>
+        <p:style>
+          <a:lnRef idx="1">
+            <a:schemeClr val="accent1"/>
+          </a:lnRef>
+          <a:fillRef idx="3">
+            <a:schemeClr val="accent1"/>
+          </a:fillRef>
+          <a:effectRef idx="2">
+            <a:schemeClr val="accent1"/>
+          </a:effectRef>
+          <a:fontRef idx="minor">
+            <a:schemeClr val="lt1"/>
+          </a:fontRef>
+        </p:style>
+        <p:txBody>
+          <a:bodyPr rtlCol="0" anchor="ctr"/>
+          <a:lstStyle/>
+          <a:p>
+            <a:pPr algn="ctr"/>
+          </a:p>
+        </p:txBody>
+      </p:sp>
+      <p:sp>
+        <p:nvSpPr>
+          <p:cNvPr id="11" name="Rectangle 10"/>
+          <p:cNvSpPr/>
+          <p:nvPr/>
+        </p:nvSpPr>
+        <p:spPr>
+          <a:xfrm>
+            <a:off x="4343400" y="1965960"/>
+            <a:ext cx="3520440" cy="109728"/>
+          </a:xfrm>
+          <a:prstGeom prst="rect">
+            <a:avLst/>
+          </a:prstGeom>
+          <a:solidFill>
+            <a:srgbClr val="99F6E4"/>
+          </a:solidFill>
+          <a:ln>
+            <a:noFill/>
+          </a:ln>
+        </p:spPr>
+        <p:style>
+          <a:lnRef idx="1">
+            <a:schemeClr val="accent1"/>
+          </a:lnRef>
+          <a:fillRef idx="3">
+            <a:schemeClr val="accent1"/>
+          </a:fillRef>
+          <a:effectRef idx="2">
+            <a:schemeClr val="accent1"/>
+          </a:effectRef>
+          <a:fontRef idx="minor">
+            <a:schemeClr val="lt1"/>
+          </a:fontRef>
+        </p:style>
+        <p:txBody>
+          <a:bodyPr rtlCol="0" anchor="ctr"/>
+          <a:lstStyle/>
+          <a:p>
+            <a:pPr algn="ctr"/>
+          </a:p>
+        </p:txBody>
+      </p:sp>
+      <p:sp>
+        <p:nvSpPr>
+          <p:cNvPr id="12" name="TextBox 11"/>
+          <p:cNvSpPr txBox="1"/>
+          <p:nvPr/>
+        </p:nvSpPr>
+        <p:spPr>
+          <a:xfrm>
+            <a:off x="4544568" y="2212848"/>
+            <a:ext cx="3108960" cy="457200"/>
+          </a:xfrm>
+          <a:prstGeom prst="rect">
+            <a:avLst/>
+          </a:prstGeom>
+          <a:noFill/>
+        </p:spPr>
+        <p:txBody>
+          <a:bodyPr wrap="square" anchor="t"/>
+          <a:lstStyle/>
+          <a:p>
+            <a:pPr algn="l"/>
+            <a:r>
+              <a:rPr sz="1600" b="1" i="0" a:ea="Calibri">
+                <a:solidFill>
+                  <a:srgbClr val="CCFBF1"/>
+                </a:solidFill>
+                <a:latin typeface="Calibri"/>
+              </a:rPr>
+              <a:t>2   Say in full</a:t>
+            </a:r>
+          </a:p>
+        </p:txBody>
+      </p:sp>
+      <p:sp>
+        <p:nvSpPr>
+          <p:cNvPr id="13" name="TextBox 12"/>
+          <p:cNvSpPr txBox="1"/>
+          <p:nvPr/>
+        </p:nvSpPr>
+        <p:spPr>
+          <a:xfrm>
+            <a:off x="4544568" y="2788920"/>
+            <a:ext cx="3108960" cy="2880360"/>
+          </a:xfrm>
+          <a:prstGeom prst="rect">
+            <a:avLst/>
+          </a:prstGeom>
+          <a:noFill/>
+        </p:spPr>
+        <p:txBody>
+          <a:bodyPr wrap="square" anchor="t"/>
+          <a:lstStyle/>
+          <a:p>
+            <a:pPr algn="l"/>
+            <a:r>
+              <a:rPr sz="1600" b="0" i="0" a:ea="Calibri">
+                <a:solidFill>
+                  <a:srgbClr val="FFFFFF"/>
+                </a:solidFill>
+                <a:latin typeface="Calibri"/>
+              </a:rPr>
+              <a:t>Eukaryotes have a nucleus and membrane-bound organelles; prokaryotes do not.</a:t>
+            </a:r>
+          </a:p>
+        </p:txBody>
+      </p:sp>
+      <p:sp>
+        <p:nvSpPr>
+          <p:cNvPr id="14" name="Rounded Rectangle 13"/>
+          <p:cNvSpPr/>
+          <p:nvPr/>
+        </p:nvSpPr>
+        <p:spPr>
+          <a:xfrm>
+            <a:off x="8046720" y="1965960"/>
+            <a:ext cx="3520440" cy="3977639"/>
+          </a:xfrm>
+          <a:prstGeom prst="roundRect">
+            <a:avLst/>
+          </a:prstGeom>
+          <a:solidFill>
+            <a:srgbClr val="003D33"/>
+          </a:solidFill>
+          <a:ln>
+            <a:noFill/>
+          </a:ln>
+        </p:spPr>
+        <p:style>
+          <a:lnRef idx="1">
+            <a:schemeClr val="accent1"/>
+          </a:lnRef>
+          <a:fillRef idx="3">
+            <a:schemeClr val="accent1"/>
+          </a:fillRef>
+          <a:effectRef idx="2">
+            <a:schemeClr val="accent1"/>
+          </a:effectRef>
+          <a:fontRef idx="minor">
+            <a:schemeClr val="lt1"/>
+          </a:fontRef>
+        </p:style>
+        <p:txBody>
+          <a:bodyPr rtlCol="0" anchor="ctr"/>
+          <a:lstStyle/>
+          <a:p>
+            <a:pPr algn="ctr"/>
+          </a:p>
+        </p:txBody>
+      </p:sp>
+      <p:sp>
+        <p:nvSpPr>
+          <p:cNvPr id="15" name="Rectangle 14"/>
+          <p:cNvSpPr/>
+          <p:nvPr/>
+        </p:nvSpPr>
+        <p:spPr>
+          <a:xfrm>
+            <a:off x="8046720" y="1965960"/>
+            <a:ext cx="3520440" cy="109728"/>
+          </a:xfrm>
+          <a:prstGeom prst="rect">
+            <a:avLst/>
+          </a:prstGeom>
+          <a:solidFill>
+            <a:srgbClr val="5EEAD4"/>
+          </a:solidFill>
+          <a:ln>
+            <a:noFill/>
+          </a:ln>
+        </p:spPr>
+        <p:style>
+          <a:lnRef idx="1">
+            <a:schemeClr val="accent1"/>
+          </a:lnRef>
+          <a:fillRef idx="3">
+            <a:schemeClr val="accent1"/>
+          </a:fillRef>
+          <a:effectRef idx="2">
+            <a:schemeClr val="accent1"/>
+          </a:effectRef>
+          <a:fontRef idx="minor">
+            <a:schemeClr val="lt1"/>
+          </a:fontRef>
+        </p:style>
+        <p:txBody>
+          <a:bodyPr rtlCol="0" anchor="ctr"/>
+          <a:lstStyle/>
+          <a:p>
+            <a:pPr algn="ctr"/>
+          </a:p>
+        </p:txBody>
+      </p:sp>
+      <p:sp>
+        <p:nvSpPr>
+          <p:cNvPr id="16" name="TextBox 15"/>
+          <p:cNvSpPr txBox="1"/>
+          <p:nvPr/>
+        </p:nvSpPr>
+        <p:spPr>
+          <a:xfrm>
+            <a:off x="8247888" y="2212848"/>
+            <a:ext cx="3108960" cy="457200"/>
+          </a:xfrm>
+          <a:prstGeom prst="rect">
+            <a:avLst/>
+          </a:prstGeom>
+          <a:noFill/>
+        </p:spPr>
+        <p:txBody>
+          <a:bodyPr wrap="square" anchor="t"/>
+          <a:lstStyle/>
+          <a:p>
+            <a:pPr algn="l"/>
+            <a:r>
+              <a:rPr sz="1600" b="1" i="0" a:ea="Calibri">
+                <a:solidFill>
+                  <a:srgbClr val="CCFBF1"/>
+                </a:solidFill>
+                <a:latin typeface="Calibri"/>
+              </a:rPr>
+              <a:t>3   Level 3 move</a:t>
+            </a:r>
+          </a:p>
+        </p:txBody>
+      </p:sp>
+      <p:sp>
+        <p:nvSpPr>
+          <p:cNvPr id="17" name="TextBox 16"/>
+          <p:cNvSpPr txBox="1"/>
+          <p:nvPr/>
+        </p:nvSpPr>
+        <p:spPr>
+          <a:xfrm>
+            <a:off x="8247888" y="2788920"/>
+            <a:ext cx="3108960" cy="2880360"/>
+          </a:xfrm>
+          <a:prstGeom prst="rect">
+            <a:avLst/>
+          </a:prstGeom>
+          <a:noFill/>
+        </p:spPr>
+        <p:txBody>
+          <a:bodyPr wrap="square" anchor="t"/>
+          <a:lstStyle/>
+          <a:p>
+            <a:pPr algn="l"/>
+            <a:r>
+              <a:rPr sz="1600" b="0" i="0" a:ea="Calibri">
+                <a:solidFill>
+                  <a:srgbClr val="FFFFFF"/>
+                </a:solidFill>
+                <a:latin typeface="Calibri"/>
+              </a:rPr>
+              <a:t>Pair every difference: 70S versus 80S, peptidoglycan versus cellulose, size.</a:t>
+            </a:r>
+          </a:p>
+        </p:txBody>
+      </p:sp>
+      <p:sp>
+        <p:nvSpPr>
+          <p:cNvPr id="18" name="Rectangle 17"/>
+          <p:cNvSpPr/>
+          <p:nvPr/>
+        </p:nvSpPr>
+        <p:spPr>
+          <a:xfrm>
+            <a:off x="0" y="6437376"/>
+            <a:ext cx="12191695" cy="420624"/>
+          </a:xfrm>
+          <a:prstGeom prst="rect">
+            <a:avLst/>
+          </a:prstGeom>
+          <a:solidFill>
+            <a:srgbClr val="004D40"/>
+          </a:solidFill>
+          <a:ln>
+            <a:noFill/>
+          </a:ln>
+        </p:spPr>
+        <p:style>
+          <a:lnRef idx="1">
+            <a:schemeClr val="accent1"/>
+          </a:lnRef>
+          <a:fillRef idx="3">
+            <a:schemeClr val="accent1"/>
+          </a:fillRef>
+          <a:effectRef idx="2">
+            <a:schemeClr val="accent1"/>
+          </a:effectRef>
+          <a:fontRef idx="minor">
+            <a:schemeClr val="lt1"/>
+          </a:fontRef>
+        </p:style>
+        <p:txBody>
+          <a:bodyPr rtlCol="0" anchor="ctr"/>
+          <a:lstStyle/>
+          <a:p>
+            <a:pPr algn="ctr"/>
+          </a:p>
+        </p:txBody>
+      </p:sp>
       <p:pic>
         <p:nvPicPr>
-          <p:cNvPr id="7" name="Picture 6" descr="jdscience-footer-logo.png"/>
+          <p:cNvPr id="19" name="Picture 18" descr="jdscience-footer-logo.png"/>
           <p:cNvPicPr>
             <a:picLocks noChangeAspect="1"/>
           </p:cNvPicPr>
@@ -18028,7 +19099,7 @@
       </p:pic>
       <p:sp>
         <p:nvSpPr>
-          <p:cNvPr id="8" name="TextBox 7"/>
+          <p:cNvPr id="20" name="TextBox 19"/>
           <p:cNvSpPr txBox="1"/>
           <p:nvPr/>
         </p:nvSpPr>
@@ -18061,7 +19132,7 @@
       </p:sp>
       <p:sp>
         <p:nvSpPr>
-          <p:cNvPr id="9" name="TextBox 8"/>
+          <p:cNvPr id="21" name="TextBox 20"/>
           <p:cNvSpPr txBox="1"/>
           <p:nvPr/>
         </p:nvSpPr>
@@ -18094,7 +19165,7 @@
       </p:sp>
       <p:sp>
         <p:nvSpPr>
-          <p:cNvPr id="10" name="TextBox 9"/>
+          <p:cNvPr id="22" name="TextBox 21"/>
           <p:cNvSpPr txBox="1"/>
           <p:nvPr/>
         </p:nvSpPr>
@@ -19205,8 +20276,8 @@
         </p:nvSpPr>
         <p:spPr>
           <a:xfrm>
-            <a:off x="6931152" y="1069848"/>
-            <a:ext cx="4617720" cy="685800"/>
+            <a:off x="6931152" y="1051560"/>
+            <a:ext cx="4617720" cy="722376"/>
           </a:xfrm>
           <a:prstGeom prst="rect">
             <a:avLst/>
@@ -19324,8 +20395,8 @@
         </p:nvSpPr>
         <p:spPr>
           <a:xfrm>
-            <a:off x="6931152" y="2029968"/>
-            <a:ext cx="4617720" cy="685800"/>
+            <a:off x="6931152" y="2011680"/>
+            <a:ext cx="4617720" cy="722376"/>
           </a:xfrm>
           <a:prstGeom prst="rect">
             <a:avLst/>
@@ -19443,8 +20514,8 @@
         </p:nvSpPr>
         <p:spPr>
           <a:xfrm>
-            <a:off x="6931152" y="2990088"/>
-            <a:ext cx="4617720" cy="685800"/>
+            <a:off x="6931152" y="2971800"/>
+            <a:ext cx="4617720" cy="722376"/>
           </a:xfrm>
           <a:prstGeom prst="rect">
             <a:avLst/>
@@ -19562,8 +20633,8 @@
         </p:nvSpPr>
         <p:spPr>
           <a:xfrm>
-            <a:off x="6931152" y="3950208"/>
-            <a:ext cx="4617720" cy="685800"/>
+            <a:off x="6931152" y="3931920"/>
+            <a:ext cx="4617720" cy="722376"/>
           </a:xfrm>
           <a:prstGeom prst="rect">
             <a:avLst/>
@@ -19681,8 +20752,8 @@
         </p:nvSpPr>
         <p:spPr>
           <a:xfrm>
-            <a:off x="6931152" y="4910328"/>
-            <a:ext cx="4617720" cy="685800"/>
+            <a:off x="6931152" y="4892040"/>
+            <a:ext cx="4617720" cy="722376"/>
           </a:xfrm>
           <a:prstGeom prst="rect">
             <a:avLst/>
@@ -20032,7 +21103,7 @@
         <p:spPr>
           <a:xfrm>
             <a:off x="6675120" y="960120"/>
-            <a:ext cx="5029200" cy="1051560"/>
+            <a:ext cx="5029200" cy="1108710"/>
           </a:xfrm>
           <a:prstGeom prst="roundRect">
             <a:avLst/>
@@ -20075,7 +21146,7 @@
         <p:spPr>
           <a:xfrm>
             <a:off x="6675120" y="960120"/>
-            <a:ext cx="91440" cy="1051560"/>
+            <a:ext cx="91440" cy="1108710"/>
           </a:xfrm>
           <a:prstGeom prst="rect">
             <a:avLst/>
@@ -20117,8 +21188,8 @@
         </p:nvSpPr>
         <p:spPr>
           <a:xfrm>
-            <a:off x="6931152" y="1069848"/>
-            <a:ext cx="4617720" cy="868680"/>
+            <a:off x="6931152" y="1051560"/>
+            <a:ext cx="4617720" cy="962406"/>
           </a:xfrm>
           <a:prstGeom prst="rect">
             <a:avLst/>
@@ -20150,8 +21221,8 @@
         </p:nvSpPr>
         <p:spPr>
           <a:xfrm>
-            <a:off x="6675120" y="2103120"/>
-            <a:ext cx="5029200" cy="1051560"/>
+            <a:off x="6675120" y="2160270"/>
+            <a:ext cx="5029200" cy="1108710"/>
           </a:xfrm>
           <a:prstGeom prst="roundRect">
             <a:avLst/>
@@ -20193,8 +21264,8 @@
         </p:nvSpPr>
         <p:spPr>
           <a:xfrm>
-            <a:off x="6675120" y="2103120"/>
-            <a:ext cx="91440" cy="1051560"/>
+            <a:off x="6675120" y="2160270"/>
+            <a:ext cx="91440" cy="1108710"/>
           </a:xfrm>
           <a:prstGeom prst="rect">
             <a:avLst/>
@@ -20236,8 +21307,8 @@
         </p:nvSpPr>
         <p:spPr>
           <a:xfrm>
-            <a:off x="6931152" y="2212848"/>
-            <a:ext cx="4617720" cy="868680"/>
+            <a:off x="6931152" y="2251710"/>
+            <a:ext cx="4617720" cy="962406"/>
           </a:xfrm>
           <a:prstGeom prst="rect">
             <a:avLst/>
@@ -20269,8 +21340,8 @@
         </p:nvSpPr>
         <p:spPr>
           <a:xfrm>
-            <a:off x="6675120" y="3246120"/>
-            <a:ext cx="5029200" cy="1051560"/>
+            <a:off x="6675120" y="3360420"/>
+            <a:ext cx="5029200" cy="1108710"/>
           </a:xfrm>
           <a:prstGeom prst="roundRect">
             <a:avLst/>
@@ -20312,8 +21383,8 @@
         </p:nvSpPr>
         <p:spPr>
           <a:xfrm>
-            <a:off x="6675120" y="3246120"/>
-            <a:ext cx="91440" cy="1051560"/>
+            <a:off x="6675120" y="3360420"/>
+            <a:ext cx="91440" cy="1108710"/>
           </a:xfrm>
           <a:prstGeom prst="rect">
             <a:avLst/>
@@ -20355,8 +21426,8 @@
         </p:nvSpPr>
         <p:spPr>
           <a:xfrm>
-            <a:off x="6931152" y="3355848"/>
-            <a:ext cx="4617720" cy="868680"/>
+            <a:off x="6931152" y="3451860"/>
+            <a:ext cx="4617720" cy="962406"/>
           </a:xfrm>
           <a:prstGeom prst="rect">
             <a:avLst/>
@@ -20388,8 +21459,8 @@
         </p:nvSpPr>
         <p:spPr>
           <a:xfrm>
-            <a:off x="6675120" y="4389120"/>
-            <a:ext cx="5029200" cy="1051560"/>
+            <a:off x="6675120" y="4560570"/>
+            <a:ext cx="5029200" cy="1108710"/>
           </a:xfrm>
           <a:prstGeom prst="roundRect">
             <a:avLst/>
@@ -20431,8 +21502,8 @@
         </p:nvSpPr>
         <p:spPr>
           <a:xfrm>
-            <a:off x="6675120" y="4389120"/>
-            <a:ext cx="91440" cy="1051560"/>
+            <a:off x="6675120" y="4560570"/>
+            <a:ext cx="91440" cy="1108710"/>
           </a:xfrm>
           <a:prstGeom prst="rect">
             <a:avLst/>
@@ -20474,8 +21545,8 @@
         </p:nvSpPr>
         <p:spPr>
           <a:xfrm>
-            <a:off x="6931152" y="4498848"/>
-            <a:ext cx="4617720" cy="868680"/>
+            <a:off x="6931152" y="4652010"/>
+            <a:ext cx="4617720" cy="962406"/>
           </a:xfrm>
           <a:prstGeom prst="rect">
             <a:avLst/>
